--- a/classes/parte-6-analisis-de-malware/142-laboratorio-seguro-de-analisis-de-malware/clase-142-presentacion.pptx
+++ b/classes/parte-6-analisis-de-malware/142-laboratorio-seguro-de-analisis-de-malware/clase-142-presentacion.pptx
@@ -17,6 +17,9 @@
     <p:sldId id="265" r:id="rId16"/>
     <p:sldId id="266" r:id="rId17"/>
     <p:sldId id="267" r:id="rId18"/>
+    <p:sldId id="268" r:id="rId19"/>
+    <p:sldId id="269" r:id="rId20"/>
+    <p:sldId id="270" r:id="rId21"/>
   </p:sldIdLst>
   <p:sldSz cx="9144000" cy="6858000" type="screen4x3"/>
   <p:notesSz cx="6858000" cy="9144000"/>
@@ -3198,7 +3201,7 @@
                   <a:srgbClr val="0B3D2E"/>
                 </a:solidFill>
               </a:rPr>
-              <a:t>⚠️ Errores comunes</a:t>
+              <a:t>✍️ Ejercicios</a:t>
             </a:r>
           </a:p>
         </p:txBody>
@@ -3236,67 +3239,82 @@
                   <a:srgbClr val="22282E"/>
                 </a:solidFill>
               </a:rPr>
-              <a:t>•  El malware "llama a casa" de verdad — Adaptador NAT/bridge activo; cámbialo a red interna</a:t>
-            </a:r>
-          </a:p>
-          <a:p>
-            <a:pPr>
-              <a:spcAft>
-                <a:spcPts val="600"/>
-              </a:spcAft>
-            </a:pPr>
-            <a:r>
-              <a:rPr sz="1500">
-                <a:solidFill>
-                  <a:srgbClr val="22282E"/>
-                </a:solidFill>
-              </a:rPr>
-              <a:t>•  INetSim no responde — Servicio no iniciado o IP/DNS mal configurados en la víctima</a:t>
-            </a:r>
-          </a:p>
-          <a:p>
-            <a:pPr>
-              <a:spcAft>
-                <a:spcPts val="600"/>
-              </a:spcAft>
-            </a:pPr>
-            <a:r>
-              <a:rPr sz="1500">
-                <a:solidFill>
-                  <a:srgbClr val="22282E"/>
-                </a:solidFill>
-              </a:rPr>
-              <a:t>•  La muestra no se ejecuta — Detección de VM; añade ofuscación de artefactos o usa bare-metal controlado</a:t>
-            </a:r>
-          </a:p>
-          <a:p>
-            <a:pPr>
-              <a:spcAft>
-                <a:spcPts val="600"/>
-              </a:spcAft>
-            </a:pPr>
-            <a:r>
-              <a:rPr sz="1500">
-                <a:solidFill>
-                  <a:srgbClr val="22282E"/>
-                </a:solidFill>
-              </a:rPr>
-              <a:t>•  Snapshot no restaura la red — El estado de red no se guardó; recrea el snapshot con la VM apagada</a:t>
-            </a:r>
-          </a:p>
-          <a:p>
-            <a:pPr>
-              <a:spcAft>
-                <a:spcPts val="600"/>
-              </a:spcAft>
-            </a:pPr>
-            <a:r>
-              <a:rPr sz="1500">
-                <a:solidFill>
-                  <a:srgbClr val="22282E"/>
-                </a:solidFill>
-              </a:rPr>
-              <a:t>•  Carpeta compartida propaga la infección — Móntala de solo lectura o desactívala durante la ejecución</a:t>
+              <a:t>•  Explica por qué NAT o bridge están prohibidos en la VM de análisis.</a:t>
+            </a:r>
+          </a:p>
+          <a:p>
+            <a:pPr>
+              <a:spcAft>
+                <a:spcPts val="600"/>
+              </a:spcAft>
+            </a:pPr>
+            <a:r>
+              <a:rPr sz="1500">
+                <a:solidFill>
+                  <a:srgbClr val="22282E"/>
+                </a:solidFill>
+              </a:rPr>
+              <a:t>•  Configura FakeNet-NG y compara su salida con INetSim.</a:t>
+            </a:r>
+          </a:p>
+          <a:p>
+            <a:pPr>
+              <a:spcAft>
+                <a:spcPts val="600"/>
+              </a:spcAft>
+            </a:pPr>
+            <a:r>
+              <a:rPr sz="1500">
+                <a:solidFill>
+                  <a:srgbClr val="22282E"/>
+                </a:solidFill>
+              </a:rPr>
+              <a:t>•  Enumera 5 artefactos que un malware puede usar para detectar VirtualBox.</a:t>
+            </a:r>
+          </a:p>
+          <a:p>
+            <a:pPr>
+              <a:spcAft>
+                <a:spcPts val="600"/>
+              </a:spcAft>
+            </a:pPr>
+            <a:r>
+              <a:rPr sz="1500">
+                <a:solidFill>
+                  <a:srgbClr val="22282E"/>
+                </a:solidFill>
+              </a:rPr>
+              <a:t>•  Documenta un runbook de "restauración a limpio" en menos de 6 pasos.</a:t>
+            </a:r>
+          </a:p>
+          <a:p>
+            <a:pPr>
+              <a:spcAft>
+                <a:spcPts val="600"/>
+              </a:spcAft>
+            </a:pPr>
+            <a:r>
+              <a:rPr sz="1500">
+                <a:solidFill>
+                  <a:srgbClr val="22282E"/>
+                </a:solidFill>
+              </a:rPr>
+              <a:t>•  Crea un snapshot antes y después de una ejecución simulada (usa un binario inocuo).</a:t>
+            </a:r>
+          </a:p>
+          <a:p>
+            <a:pPr>
+              <a:spcAft>
+                <a:spcPts val="600"/>
+              </a:spcAft>
+            </a:pPr>
+            <a:r>
+              <a:rPr sz="1500">
+                <a:solidFill>
+                  <a:srgbClr val="22282E"/>
+                </a:solidFill>
+              </a:rPr>
+              <a:t>•  Diseña una regla de firewall del hypervisor que garantice el aislamiento.</a:t>
             </a:r>
           </a:p>
         </p:txBody>
@@ -3347,7 +3365,7 @@
                   <a:srgbClr val="0B3D2E"/>
                 </a:solidFill>
               </a:rPr>
-              <a:t>❓ Preguntas frecuentes</a:t>
+              <a:t>📝 Reto verificable</a:t>
             </a:r>
           </a:p>
         </p:txBody>
@@ -3385,37 +3403,22 @@
                   <a:srgbClr val="22282E"/>
                 </a:solidFill>
               </a:rPr>
-              <a:t>•  ❓ ¿Puedo analizar en mi PC si tengo cuidado? No. Un descuido basta para cifrar tus datos o infectar la red. Usa siempre VM desechable.</a:t>
-            </a:r>
-          </a:p>
-          <a:p>
-            <a:pPr>
-              <a:spcAft>
-                <a:spcPts val="600"/>
-              </a:spcAft>
-            </a:pPr>
-            <a:r>
-              <a:rPr sz="1500">
-                <a:solidFill>
-                  <a:srgbClr val="22282E"/>
-                </a:solidFill>
-              </a:rPr>
-              <a:t>•  ❓ ¿VirtualBox o VMware? Ambos sirven. VMware suele resistir mejor ciertas detecciones; VirtualBox es gratuito. Lo esencial es el aislamiento y los snapshots.</a:t>
-            </a:r>
-          </a:p>
-          <a:p>
-            <a:pPr>
-              <a:spcAft>
-                <a:spcPts val="600"/>
-              </a:spcAft>
-            </a:pPr>
-            <a:r>
-              <a:rPr sz="1500">
-                <a:solidFill>
-                  <a:srgbClr val="22282E"/>
-                </a:solidFill>
-              </a:rPr>
-              <a:t>•  ❓ ¿Y si el malware detecta la VM y no corre? Es común. Puedes reforzar el enmascaramiento de artefactos, usar sandboxes comerciales o, para casos avanzados, un entorno bare-metal aislado físicamente.</a:t>
+              <a:t>•  Entrega un laboratorio funcional donde una petición HTTP desde la VM de análisis sea respondida por tu VM de servicios y ninguna petición llegue a Internet.</a:t>
+            </a:r>
+          </a:p>
+          <a:p>
+            <a:pPr>
+              <a:spcAft>
+                <a:spcPts val="600"/>
+              </a:spcAft>
+            </a:pPr>
+            <a:r>
+              <a:rPr sz="1500">
+                <a:solidFill>
+                  <a:srgbClr val="22282E"/>
+                </a:solidFill>
+              </a:rPr>
+              <a:t>•  Criterio de aceptación: una captura de Wireshark muestra la resolución DNS y la respuesta HTTP servidas por 10.0.0.1, y ping a una IP pública falla por timeout.</a:t>
             </a:r>
           </a:p>
         </p:txBody>
@@ -3466,7 +3469,7 @@
                   <a:srgbClr val="0B3D2E"/>
                 </a:solidFill>
               </a:rPr>
-              <a:t>🔗 Referencias</a:t>
+              <a:t>⚠️ Errores comunes</a:t>
             </a:r>
           </a:p>
         </p:txBody>
@@ -3504,6 +3507,274 @@
                   <a:srgbClr val="22282E"/>
                 </a:solidFill>
               </a:rPr>
+              <a:t>•  El malware "llama a casa" de verdad — Adaptador NAT/bridge activo; cámbialo a red interna</a:t>
+            </a:r>
+          </a:p>
+          <a:p>
+            <a:pPr>
+              <a:spcAft>
+                <a:spcPts val="600"/>
+              </a:spcAft>
+            </a:pPr>
+            <a:r>
+              <a:rPr sz="1500">
+                <a:solidFill>
+                  <a:srgbClr val="22282E"/>
+                </a:solidFill>
+              </a:rPr>
+              <a:t>•  INetSim no responde — Servicio no iniciado o IP/DNS mal configurados en la víctima</a:t>
+            </a:r>
+          </a:p>
+          <a:p>
+            <a:pPr>
+              <a:spcAft>
+                <a:spcPts val="600"/>
+              </a:spcAft>
+            </a:pPr>
+            <a:r>
+              <a:rPr sz="1500">
+                <a:solidFill>
+                  <a:srgbClr val="22282E"/>
+                </a:solidFill>
+              </a:rPr>
+              <a:t>•  La muestra no se ejecuta — Detección de VM; añade ofuscación de artefactos o usa bare-metal controlado</a:t>
+            </a:r>
+          </a:p>
+          <a:p>
+            <a:pPr>
+              <a:spcAft>
+                <a:spcPts val="600"/>
+              </a:spcAft>
+            </a:pPr>
+            <a:r>
+              <a:rPr sz="1500">
+                <a:solidFill>
+                  <a:srgbClr val="22282E"/>
+                </a:solidFill>
+              </a:rPr>
+              <a:t>•  Snapshot no restaura la red — El estado de red no se guardó; recrea el snapshot con la VM apagada</a:t>
+            </a:r>
+          </a:p>
+          <a:p>
+            <a:pPr>
+              <a:spcAft>
+                <a:spcPts val="600"/>
+              </a:spcAft>
+            </a:pPr>
+            <a:r>
+              <a:rPr sz="1500">
+                <a:solidFill>
+                  <a:srgbClr val="22282E"/>
+                </a:solidFill>
+              </a:rPr>
+              <a:t>•  Carpeta compartida propaga la infección — Móntala de solo lectura o desactívala durante la ejecución</a:t>
+            </a:r>
+          </a:p>
+        </p:txBody>
+      </p:sp>
+    </p:spTree>
+  </p:cSld>
+  <p:clrMapOvr>
+    <a:masterClrMapping/>
+  </p:clrMapOvr>
+</p:sld>
+</file>
+
+<file path=ppt/slides/slide13.xml><?xml version="1.0" encoding="utf-8"?>
+<p:sld xmlns:a="http://schemas.openxmlformats.org/drawingml/2006/main" xmlns:p="http://schemas.openxmlformats.org/presentationml/2006/main" xmlns:r="http://schemas.openxmlformats.org/officeDocument/2006/relationships">
+  <p:cSld>
+    <p:spTree>
+      <p:nvGrpSpPr>
+        <p:cNvPr id="1" name=""/>
+        <p:cNvGrpSpPr/>
+        <p:nvPr/>
+      </p:nvGrpSpPr>
+      <p:grpSpPr/>
+      <p:sp>
+        <p:nvSpPr>
+          <p:cNvPr id="2" name="TextBox 1"/>
+          <p:cNvSpPr txBox="1"/>
+          <p:nvPr/>
+        </p:nvSpPr>
+        <p:spPr>
+          <a:xfrm>
+            <a:off x="457200" y="320040"/>
+            <a:ext cx="8229600" cy="822960"/>
+          </a:xfrm>
+          <a:prstGeom prst="rect">
+            <a:avLst/>
+          </a:prstGeom>
+          <a:noFill/>
+        </p:spPr>
+        <p:txBody>
+          <a:bodyPr wrap="square">
+            <a:spAutoFit/>
+          </a:bodyPr>
+          <a:lstStyle/>
+          <a:p>
+            <a:r>
+              <a:rPr sz="2600" b="1">
+                <a:solidFill>
+                  <a:srgbClr val="0B3D2E"/>
+                </a:solidFill>
+              </a:rPr>
+              <a:t>❓ Preguntas frecuentes</a:t>
+            </a:r>
+          </a:p>
+        </p:txBody>
+      </p:sp>
+      <p:sp>
+        <p:nvSpPr>
+          <p:cNvPr id="3" name="TextBox 2"/>
+          <p:cNvSpPr txBox="1"/>
+          <p:nvPr/>
+        </p:nvSpPr>
+        <p:spPr>
+          <a:xfrm>
+            <a:off x="457200" y="1280160"/>
+            <a:ext cx="8229600" cy="4937760"/>
+          </a:xfrm>
+          <a:prstGeom prst="rect">
+            <a:avLst/>
+          </a:prstGeom>
+          <a:noFill/>
+        </p:spPr>
+        <p:txBody>
+          <a:bodyPr wrap="square">
+            <a:spAutoFit/>
+          </a:bodyPr>
+          <a:lstStyle/>
+          <a:p>
+            <a:pPr>
+              <a:spcAft>
+                <a:spcPts val="600"/>
+              </a:spcAft>
+            </a:pPr>
+            <a:r>
+              <a:rPr sz="1500">
+                <a:solidFill>
+                  <a:srgbClr val="22282E"/>
+                </a:solidFill>
+              </a:rPr>
+              <a:t>•  ❓ ¿Puedo analizar en mi PC si tengo cuidado? No. Un descuido basta para cifrar tus datos o infectar la red. Usa siempre VM desechable.</a:t>
+            </a:r>
+          </a:p>
+          <a:p>
+            <a:pPr>
+              <a:spcAft>
+                <a:spcPts val="600"/>
+              </a:spcAft>
+            </a:pPr>
+            <a:r>
+              <a:rPr sz="1500">
+                <a:solidFill>
+                  <a:srgbClr val="22282E"/>
+                </a:solidFill>
+              </a:rPr>
+              <a:t>•  ❓ ¿VirtualBox o VMware? Ambos sirven. VMware suele resistir mejor ciertas detecciones; VirtualBox es gratuito. Lo esencial es el aislamiento y los snapshots.</a:t>
+            </a:r>
+          </a:p>
+          <a:p>
+            <a:pPr>
+              <a:spcAft>
+                <a:spcPts val="600"/>
+              </a:spcAft>
+            </a:pPr>
+            <a:r>
+              <a:rPr sz="1500">
+                <a:solidFill>
+                  <a:srgbClr val="22282E"/>
+                </a:solidFill>
+              </a:rPr>
+              <a:t>•  ❓ ¿Y si el malware detecta la VM y no corre? Es común. Puedes reforzar el enmascaramiento de artefactos, usar sandboxes comerciales o, para casos avanzados, un entorno bare-metal aislado físicamente.</a:t>
+            </a:r>
+          </a:p>
+        </p:txBody>
+      </p:sp>
+    </p:spTree>
+  </p:cSld>
+  <p:clrMapOvr>
+    <a:masterClrMapping/>
+  </p:clrMapOvr>
+</p:sld>
+</file>
+
+<file path=ppt/slides/slide14.xml><?xml version="1.0" encoding="utf-8"?>
+<p:sld xmlns:a="http://schemas.openxmlformats.org/drawingml/2006/main" xmlns:p="http://schemas.openxmlformats.org/presentationml/2006/main" xmlns:r="http://schemas.openxmlformats.org/officeDocument/2006/relationships">
+  <p:cSld>
+    <p:spTree>
+      <p:nvGrpSpPr>
+        <p:cNvPr id="1" name=""/>
+        <p:cNvGrpSpPr/>
+        <p:nvPr/>
+      </p:nvGrpSpPr>
+      <p:grpSpPr/>
+      <p:sp>
+        <p:nvSpPr>
+          <p:cNvPr id="2" name="TextBox 1"/>
+          <p:cNvSpPr txBox="1"/>
+          <p:nvPr/>
+        </p:nvSpPr>
+        <p:spPr>
+          <a:xfrm>
+            <a:off x="457200" y="320040"/>
+            <a:ext cx="8229600" cy="822960"/>
+          </a:xfrm>
+          <a:prstGeom prst="rect">
+            <a:avLst/>
+          </a:prstGeom>
+          <a:noFill/>
+        </p:spPr>
+        <p:txBody>
+          <a:bodyPr wrap="square">
+            <a:spAutoFit/>
+          </a:bodyPr>
+          <a:lstStyle/>
+          <a:p>
+            <a:r>
+              <a:rPr sz="2600" b="1">
+                <a:solidFill>
+                  <a:srgbClr val="0B3D2E"/>
+                </a:solidFill>
+              </a:rPr>
+              <a:t>🔗 Referencias</a:t>
+            </a:r>
+          </a:p>
+        </p:txBody>
+      </p:sp>
+      <p:sp>
+        <p:nvSpPr>
+          <p:cNvPr id="3" name="TextBox 2"/>
+          <p:cNvSpPr txBox="1"/>
+          <p:nvPr/>
+        </p:nvSpPr>
+        <p:spPr>
+          <a:xfrm>
+            <a:off x="457200" y="1280160"/>
+            <a:ext cx="8229600" cy="4937760"/>
+          </a:xfrm>
+          <a:prstGeom prst="rect">
+            <a:avLst/>
+          </a:prstGeom>
+          <a:noFill/>
+        </p:spPr>
+        <p:txBody>
+          <a:bodyPr wrap="square">
+            <a:spAutoFit/>
+          </a:bodyPr>
+          <a:lstStyle/>
+          <a:p>
+            <a:pPr>
+              <a:spcAft>
+                <a:spcPts val="600"/>
+              </a:spcAft>
+            </a:pPr>
+            <a:r>
+              <a:rPr sz="1500">
+                <a:solidFill>
+                  <a:srgbClr val="22282E"/>
+                </a:solidFill>
+              </a:rPr>
               <a:t>•  Monnappa K. A., Learning Malware Analysis, cap. 1.</a:t>
             </a:r>
           </a:p>
@@ -3569,6 +3840,81 @@
           </a:p>
         </p:txBody>
       </p:sp>
+    </p:spTree>
+  </p:cSld>
+  <p:clrMapOvr>
+    <a:masterClrMapping/>
+  </p:clrMapOvr>
+</p:sld>
+</file>
+
+<file path=ppt/slides/slide15.xml><?xml version="1.0" encoding="utf-8"?>
+<p:sld xmlns:a="http://schemas.openxmlformats.org/drawingml/2006/main" xmlns:p="http://schemas.openxmlformats.org/presentationml/2006/main" xmlns:r="http://schemas.openxmlformats.org/officeDocument/2006/relationships">
+  <p:cSld>
+    <p:spTree>
+      <p:nvGrpSpPr>
+        <p:cNvPr id="1" name=""/>
+        <p:cNvGrpSpPr/>
+        <p:nvPr/>
+      </p:nvGrpSpPr>
+      <p:grpSpPr/>
+      <p:sp>
+        <p:nvSpPr>
+          <p:cNvPr id="2" name="TextBox 1"/>
+          <p:cNvSpPr txBox="1"/>
+          <p:nvPr/>
+        </p:nvSpPr>
+        <p:spPr>
+          <a:xfrm>
+            <a:off x="457200" y="274320"/>
+            <a:ext cx="8229600" cy="640080"/>
+          </a:xfrm>
+          <a:prstGeom prst="rect">
+            <a:avLst/>
+          </a:prstGeom>
+          <a:noFill/>
+        </p:spPr>
+        <p:txBody>
+          <a:bodyPr wrap="square">
+            <a:spAutoFit/>
+          </a:bodyPr>
+          <a:lstStyle/>
+          <a:p>
+            <a:r>
+              <a:rPr sz="2200" b="1">
+                <a:solidFill>
+                  <a:srgbClr val="0B3D2E"/>
+                </a:solidFill>
+              </a:rPr>
+              <a:t>Diagrama de la clase</a:t>
+            </a:r>
+          </a:p>
+        </p:txBody>
+      </p:sp>
+      <p:pic>
+        <p:nvPicPr>
+          <p:cNvPr id="3" name="Picture 2" descr="757e3c8cddef60fe.png"/>
+          <p:cNvPicPr>
+            <a:picLocks noChangeAspect="1"/>
+          </p:cNvPicPr>
+          <p:nvPr/>
+        </p:nvPicPr>
+        <p:blipFill>
+          <a:blip r:embed="rId2"/>
+          <a:stretch>
+            <a:fillRect/>
+          </a:stretch>
+        </p:blipFill>
+        <p:spPr>
+          <a:xfrm>
+            <a:off x="1639765" y="1097280"/>
+            <a:ext cx="5864469" cy="5303520"/>
+          </a:xfrm>
+          <a:prstGeom prst="rect">
+            <a:avLst/>
+          </a:prstGeom>
+        </p:spPr>
+      </p:pic>
     </p:spTree>
   </p:cSld>
   <p:clrMapOvr>
@@ -3653,7 +3999,7 @@
                   <a:srgbClr val="22282E"/>
                 </a:solidFill>
               </a:rPr>
-              <a:t>•  Montar un laboratorio de análisis aislado, reversible y controlado donde ejecutar muestras reales sin riesgo de fuga a la red ni al host. El alumno terminará con una VM Windows de análisis, una VM Linux que simula servicios de red, snapshots limpios y un procedimiento de manejo de muestras que impide accidentes.</a:t>
+              <a:t>•  Montar un laboratorio de análisis aislado, reversible y controlado donde ejecutar muestras reales sin riesgo de fuga a la red ni al host. El alumno terminará con una VM Windows de análisis, una VM…</a:t>
             </a:r>
           </a:p>
         </p:txBody>
@@ -4047,7 +4393,7 @@
                   <a:srgbClr val="0B3D2E"/>
                 </a:solidFill>
               </a:rPr>
-              <a:t>📖 Definiciones y características</a:t>
+              <a:t>🧠 Explicación en profundidad</a:t>
             </a:r>
           </a:p>
         </p:txBody>
@@ -4085,82 +4431,97 @@
                   <a:srgbClr val="22282E"/>
                 </a:solidFill>
               </a:rPr>
-              <a:t>•  Snapshot: foto del estado completo de la VM. Característica clave: restauración instantánea a limpio.</a:t>
-            </a:r>
-          </a:p>
-          <a:p>
-            <a:pPr>
-              <a:spcAft>
-                <a:spcPts val="600"/>
-              </a:spcAft>
-            </a:pPr>
-            <a:r>
-              <a:rPr sz="1500">
-                <a:solidFill>
-                  <a:srgbClr val="22282E"/>
-                </a:solidFill>
-              </a:rPr>
-              <a:t>•  Red host-only / internal: red virtual sin ruta a Internet ni al host. Característica clave: contención.</a:t>
-            </a:r>
-          </a:p>
-          <a:p>
-            <a:pPr>
-              <a:spcAft>
-                <a:spcPts val="600"/>
-              </a:spcAft>
-            </a:pPr>
-            <a:r>
-              <a:rPr sz="1500">
-                <a:solidFill>
-                  <a:srgbClr val="22282E"/>
-                </a:solidFill>
-              </a:rPr>
-              <a:t>•  FLARE VM: distribución de herramientas de análisis sobre Windows (Mandiant). Característica clave: arsenal preinstalado.</a:t>
-            </a:r>
-          </a:p>
-          <a:p>
-            <a:pPr>
-              <a:spcAft>
-                <a:spcPts val="600"/>
-              </a:spcAft>
-            </a:pPr>
-            <a:r>
-              <a:rPr sz="1500">
-                <a:solidFill>
-                  <a:srgbClr val="22282E"/>
-                </a:solidFill>
-              </a:rPr>
-              <a:t>•  REMnux: distro Linux para análisis de malware y forense. Característica clave: servicios y utilidades listas.</a:t>
-            </a:r>
-          </a:p>
-          <a:p>
-            <a:pPr>
-              <a:spcAft>
-                <a:spcPts val="600"/>
-              </a:spcAft>
-            </a:pPr>
-            <a:r>
-              <a:rPr sz="1500">
-                <a:solidFill>
-                  <a:srgbClr val="22282E"/>
-                </a:solidFill>
-              </a:rPr>
-              <a:t>•  INetSim / FakeNet-NG: simulan Internet (DNS, HTTP/S, FTP…) para capturar tráfico del malware. Característica clave: engaño de red.</a:t>
-            </a:r>
-          </a:p>
-          <a:p>
-            <a:pPr>
-              <a:spcAft>
-                <a:spcPts val="600"/>
-              </a:spcAft>
-            </a:pPr>
-            <a:r>
-              <a:rPr sz="1500">
-                <a:solidFill>
-                  <a:srgbClr val="22282E"/>
-                </a:solidFill>
-              </a:rPr>
-              <a:t>•  Detección de sandbox: técnicas del malware para saber si está en VM. Característica clave: evasión del análisis.</a:t>
+              <a:t>•  Antes de examinar una sola muestra hay que montar un entorno donde el malware pueda ejecutarse sin</a:t>
+            </a:r>
+          </a:p>
+          <a:p>
+            <a:pPr>
+              <a:spcAft>
+                <a:spcPts val="600"/>
+              </a:spcAft>
+            </a:pPr>
+            <a:r>
+              <a:rPr sz="1500">
+                <a:solidFill>
+                  <a:srgbClr val="22282E"/>
+                </a:solidFill>
+              </a:rPr>
+              <a:t>•  escapar ni causar daño real. Esto no es una recomendación, es el requisito absoluto de la disciplina:</a:t>
+            </a:r>
+          </a:p>
+          <a:p>
+            <a:pPr>
+              <a:spcAft>
+                <a:spcPts val="600"/>
+              </a:spcAft>
+            </a:pPr>
+            <a:r>
+              <a:rPr sz="1500">
+                <a:solidFill>
+                  <a:srgbClr val="22282E"/>
+                </a:solidFill>
+              </a:rPr>
+              <a:t>•  el analista trabaja a diario con código diseñado para infectar, robar y propagarse, y un descuido lo</a:t>
+            </a:r>
+          </a:p>
+          <a:p>
+            <a:pPr>
+              <a:spcAft>
+                <a:spcPts val="600"/>
+              </a:spcAft>
+            </a:pPr>
+            <a:r>
+              <a:rPr sz="1500">
+                <a:solidFill>
+                  <a:srgbClr val="22282E"/>
+                </a:solidFill>
+              </a:rPr>
+              <a:t>•  convierte en la primera víctima —o en el vector que infecta a su organización—. El laboratorio de</a:t>
+            </a:r>
+          </a:p>
+          <a:p>
+            <a:pPr>
+              <a:spcAft>
+                <a:spcPts val="600"/>
+              </a:spcAft>
+            </a:pPr>
+            <a:r>
+              <a:rPr sz="1500">
+                <a:solidFill>
+                  <a:srgbClr val="22282E"/>
+                </a:solidFill>
+              </a:rPr>
+              <a:t>•  análisis de malware es la versión extrema del laboratorio aislado de la Clase 004, y su</a:t>
+            </a:r>
+          </a:p>
+          <a:p>
+            <a:pPr>
+              <a:spcAft>
+                <a:spcPts val="600"/>
+              </a:spcAft>
+            </a:pPr>
+            <a:r>
+              <a:rPr sz="1500">
+                <a:solidFill>
+                  <a:srgbClr val="22282E"/>
+                </a:solidFill>
+              </a:rPr>
+              <a:t>•  diseño se rige por dos principios: aislamiento (el malware no puede llegar a nada real) y</a:t>
+            </a:r>
+          </a:p>
+          <a:p>
+            <a:pPr>
+              <a:spcAft>
+                <a:spcPts val="600"/>
+              </a:spcAft>
+            </a:pPr>
+            <a:r>
+              <a:rPr sz="1500">
+                <a:solidFill>
+                  <a:srgbClr val="22282E"/>
+                </a:solidFill>
+              </a:rPr>
+              <a:t>•  reversibilidad (volver a un estado limpio tras cada ejecución).</a:t>
             </a:r>
           </a:p>
         </p:txBody>
@@ -4211,7 +4572,7 @@
                   <a:srgbClr val="0B3D2E"/>
                 </a:solidFill>
               </a:rPr>
-              <a:t>🧰 Herramientas y preparación</a:t>
+              <a:t>📖 Definiciones y características</a:t>
             </a:r>
           </a:p>
         </p:txBody>
@@ -4249,67 +4610,82 @@
                   <a:srgbClr val="22282E"/>
                 </a:solidFill>
               </a:rPr>
-              <a:t>•  Hypervisor: VirtualBox o VMware Workstation.</a:t>
-            </a:r>
-          </a:p>
-          <a:p>
-            <a:pPr>
-              <a:spcAft>
-                <a:spcPts val="600"/>
-              </a:spcAft>
-            </a:pPr>
-            <a:r>
-              <a:rPr sz="1500">
-                <a:solidFill>
-                  <a:srgbClr val="22282E"/>
-                </a:solidFill>
-              </a:rPr>
-              <a:t>•  VM de análisis: Windows 10 + FLARE VM (https://github.com/mandiant/flare-vm).</a:t>
-            </a:r>
-          </a:p>
-          <a:p>
-            <a:pPr>
-              <a:spcAft>
-                <a:spcPts val="600"/>
-              </a:spcAft>
-            </a:pPr>
-            <a:r>
-              <a:rPr sz="1500">
-                <a:solidFill>
-                  <a:srgbClr val="22282E"/>
-                </a:solidFill>
-              </a:rPr>
-              <a:t>•  VM de servicios: REMnux (https://remnux.org) con INetSim o FakeNet-NG.</a:t>
-            </a:r>
-          </a:p>
-          <a:p>
-            <a:pPr>
-              <a:spcAft>
-                <a:spcPts val="600"/>
-              </a:spcAft>
-            </a:pPr>
-            <a:r>
-              <a:rPr sz="1500">
-                <a:solidFill>
-                  <a:srgbClr val="22282E"/>
-                </a:solidFill>
-              </a:rPr>
-              <a:t>•  Herramientas de captura: Wireshark, Process Monitor, Process Hacker.</a:t>
-            </a:r>
-          </a:p>
-          <a:p>
-            <a:pPr>
-              <a:spcAft>
-                <a:spcPts val="600"/>
-              </a:spcAft>
-            </a:pPr>
-            <a:r>
-              <a:rPr sz="1500">
-                <a:solidFill>
-                  <a:srgbClr val="22282E"/>
-                </a:solidFill>
-              </a:rPr>
-              <a:t>•  Descompresor con soporte de contraseña (7-Zip) para muestras cifradas.</a:t>
+              <a:t>•  Snapshot: foto del estado completo de la VM. Característica clave: restauración instantánea a limpio.</a:t>
+            </a:r>
+          </a:p>
+          <a:p>
+            <a:pPr>
+              <a:spcAft>
+                <a:spcPts val="600"/>
+              </a:spcAft>
+            </a:pPr>
+            <a:r>
+              <a:rPr sz="1500">
+                <a:solidFill>
+                  <a:srgbClr val="22282E"/>
+                </a:solidFill>
+              </a:rPr>
+              <a:t>•  Red host-only / internal: red virtual sin ruta a Internet ni al host. Característica clave: contención.</a:t>
+            </a:r>
+          </a:p>
+          <a:p>
+            <a:pPr>
+              <a:spcAft>
+                <a:spcPts val="600"/>
+              </a:spcAft>
+            </a:pPr>
+            <a:r>
+              <a:rPr sz="1500">
+                <a:solidFill>
+                  <a:srgbClr val="22282E"/>
+                </a:solidFill>
+              </a:rPr>
+              <a:t>•  FLARE VM: distribución de herramientas de análisis sobre Windows (Mandiant). Característica clave: arsenal preinstalado.</a:t>
+            </a:r>
+          </a:p>
+          <a:p>
+            <a:pPr>
+              <a:spcAft>
+                <a:spcPts val="600"/>
+              </a:spcAft>
+            </a:pPr>
+            <a:r>
+              <a:rPr sz="1500">
+                <a:solidFill>
+                  <a:srgbClr val="22282E"/>
+                </a:solidFill>
+              </a:rPr>
+              <a:t>•  REMnux: distro Linux para análisis de malware y forense. Característica clave: servicios y utilidades listas.</a:t>
+            </a:r>
+          </a:p>
+          <a:p>
+            <a:pPr>
+              <a:spcAft>
+                <a:spcPts val="600"/>
+              </a:spcAft>
+            </a:pPr>
+            <a:r>
+              <a:rPr sz="1500">
+                <a:solidFill>
+                  <a:srgbClr val="22282E"/>
+                </a:solidFill>
+              </a:rPr>
+              <a:t>•  INetSim / FakeNet-NG: simulan Internet (DNS, HTTP/S, FTP…) para capturar tráfico del malware. Característica clave: engaño de red.</a:t>
+            </a:r>
+          </a:p>
+          <a:p>
+            <a:pPr>
+              <a:spcAft>
+                <a:spcPts val="600"/>
+              </a:spcAft>
+            </a:pPr>
+            <a:r>
+              <a:rPr sz="1500">
+                <a:solidFill>
+                  <a:srgbClr val="22282E"/>
+                </a:solidFill>
+              </a:rPr>
+              <a:t>•  Detección de sandbox: técnicas del malware para saber si está en VM. Característica clave: evasión del análisis.</a:t>
             </a:r>
           </a:p>
         </p:txBody>
@@ -4360,7 +4736,7 @@
                   <a:srgbClr val="0B3D2E"/>
                 </a:solidFill>
               </a:rPr>
-              <a:t>🧪 Laboratorio guiado</a:t>
+              <a:t>📔 Glosario</a:t>
             </a:r>
           </a:p>
         </p:txBody>
@@ -4398,97 +4774,97 @@
                   <a:srgbClr val="22282E"/>
                 </a:solidFill>
               </a:rPr>
-              <a:t>•  Crea dos VMs: WIN-ANALYSIS (Windows) y LINUX-SERVICES (REMnux). Asígnalas a una red interna llamada labnet; ninguna tiene adaptador NAT/bridge.</a:t>
-            </a:r>
-          </a:p>
-          <a:p>
-            <a:pPr>
-              <a:spcAft>
-                <a:spcPts val="600"/>
-              </a:spcAft>
-            </a:pPr>
-            <a:r>
-              <a:rPr sz="1500">
-                <a:solidFill>
-                  <a:srgbClr val="22282E"/>
-                </a:solidFill>
-              </a:rPr>
-              <a:t>•  En LINUX-SERVICES fija IP estática (p. ej. 10.0.0.1) y en WIN-ANALYSIS pon gateway y DNS apuntando a 10.0.0.1.</a:t>
-            </a:r>
-          </a:p>
-          <a:p>
-            <a:pPr>
-              <a:spcAft>
-                <a:spcPts val="600"/>
-              </a:spcAft>
-            </a:pPr>
-            <a:r>
-              <a:rPr sz="1500">
-                <a:solidFill>
-                  <a:srgbClr val="22282E"/>
-                </a:solidFill>
-              </a:rPr>
-              <a:t>•  Instala FLARE VM en Windows siguiendo su script de instalación. Reinicia y verifica que aparecen las herramientas.</a:t>
-            </a:r>
-          </a:p>
-          <a:p>
-            <a:pPr>
-              <a:spcAft>
-                <a:spcPts val="600"/>
-              </a:spcAft>
-            </a:pPr>
-            <a:r>
-              <a:rPr sz="1500">
-                <a:solidFill>
-                  <a:srgbClr val="22282E"/>
-                </a:solidFill>
-              </a:rPr>
-              <a:t>•  En REMnux arranca INetSim: sudo inetsim y confirma que responde HTTP/DNS. Alternativa en Windows: fakenet dentro de la propia VM de análisis.</a:t>
-            </a:r>
-          </a:p>
-          <a:p>
-            <a:pPr>
-              <a:spcAft>
-                <a:spcPts val="600"/>
-              </a:spcAft>
-            </a:pPr>
-            <a:r>
-              <a:rPr sz="1500">
-                <a:solidFill>
-                  <a:srgbClr val="22282E"/>
-                </a:solidFill>
-              </a:rPr>
-              <a:t>•  Desde WIN-ANALYSIS, prueba nslookup ejemplo.com y curl http://ejemplo.com; deben resolver y responder gracias a INetSim, sin Internet real.</a:t>
-            </a:r>
-          </a:p>
-          <a:p>
-            <a:pPr>
-              <a:spcAft>
-                <a:spcPts val="600"/>
-              </a:spcAft>
-            </a:pPr>
-            <a:r>
-              <a:rPr sz="1500">
-                <a:solidFill>
-                  <a:srgbClr val="22282E"/>
-                </a:solidFill>
-              </a:rPr>
-              <a:t>•  Toma un snapshot limpio de cada VM llamado base-clean.</a:t>
-            </a:r>
-          </a:p>
-          <a:p>
-            <a:pPr>
-              <a:spcAft>
-                <a:spcPts val="600"/>
-              </a:spcAft>
-            </a:pPr>
-            <a:r>
-              <a:rPr sz="1500">
-                <a:solidFill>
-                  <a:srgbClr val="22282E"/>
-                </a:solidFill>
-              </a:rPr>
-              <a:t>•  Verifica el aislamiento: intenta ping 8.8.8.8 desde Windows; debe fallar. Si responde, corrige la red antes de continuar.</a:t>
+              <a:t>•  Término — Definición concisa</a:t>
+            </a:r>
+          </a:p>
+          <a:p>
+            <a:pPr>
+              <a:spcAft>
+                <a:spcPts val="600"/>
+              </a:spcAft>
+            </a:pPr>
+            <a:r>
+              <a:rPr sz="1500">
+                <a:solidFill>
+                  <a:srgbClr val="22282E"/>
+                </a:solidFill>
+              </a:rPr>
+              <a:t>•  Laboratorio aislado — Entorno donde el malware no puede escapar ni dañar</a:t>
+            </a:r>
+          </a:p>
+          <a:p>
+            <a:pPr>
+              <a:spcAft>
+                <a:spcPts val="600"/>
+              </a:spcAft>
+            </a:pPr>
+            <a:r>
+              <a:rPr sz="1500">
+                <a:solidFill>
+                  <a:srgbClr val="22282E"/>
+                </a:solidFill>
+              </a:rPr>
+              <a:t>•  Aislamiento de red — Host-only o interna, sin ruta a Internet real</a:t>
+            </a:r>
+          </a:p>
+          <a:p>
+            <a:pPr>
+              <a:spcAft>
+                <a:spcPts val="600"/>
+              </a:spcAft>
+            </a:pPr>
+            <a:r>
+              <a:rPr sz="1500">
+                <a:solidFill>
+                  <a:srgbClr val="22282E"/>
+                </a:solidFill>
+              </a:rPr>
+              <a:t>•  Reversibilidad — Volver a un estado limpio tras cada ejecución</a:t>
+            </a:r>
+          </a:p>
+          <a:p>
+            <a:pPr>
+              <a:spcAft>
+                <a:spcPts val="600"/>
+              </a:spcAft>
+            </a:pPr>
+            <a:r>
+              <a:rPr sz="1500">
+                <a:solidFill>
+                  <a:srgbClr val="22282E"/>
+                </a:solidFill>
+              </a:rPr>
+              <a:t>•  VM de análisis — Máquina donde se ejecuta y estudia la muestra</a:t>
+            </a:r>
+          </a:p>
+          <a:p>
+            <a:pPr>
+              <a:spcAft>
+                <a:spcPts val="600"/>
+              </a:spcAft>
+            </a:pPr>
+            <a:r>
+              <a:rPr sz="1500">
+                <a:solidFill>
+                  <a:srgbClr val="22282E"/>
+                </a:solidFill>
+              </a:rPr>
+              <a:t>•  FLARE VM — Distribución Windows con el instrumental de análisis</a:t>
+            </a:r>
+          </a:p>
+          <a:p>
+            <a:pPr>
+              <a:spcAft>
+                <a:spcPts val="600"/>
+              </a:spcAft>
+            </a:pPr>
+            <a:r>
+              <a:rPr sz="1500">
+                <a:solidFill>
+                  <a:srgbClr val="22282E"/>
+                </a:solidFill>
+              </a:rPr>
+              <a:t>•  VM de servicios — Máquina que simula los servicios de red</a:t>
             </a:r>
           </a:p>
         </p:txBody>
@@ -4539,7 +4915,7 @@
                   <a:srgbClr val="0B3D2E"/>
                 </a:solidFill>
               </a:rPr>
-              <a:t>✍️ Ejercicios</a:t>
+              <a:t>🧰 Herramientas y preparación</a:t>
             </a:r>
           </a:p>
         </p:txBody>
@@ -4577,82 +4953,67 @@
                   <a:srgbClr val="22282E"/>
                 </a:solidFill>
               </a:rPr>
-              <a:t>•  Explica por qué NAT o bridge están prohibidos en la VM de análisis.</a:t>
-            </a:r>
-          </a:p>
-          <a:p>
-            <a:pPr>
-              <a:spcAft>
-                <a:spcPts val="600"/>
-              </a:spcAft>
-            </a:pPr>
-            <a:r>
-              <a:rPr sz="1500">
-                <a:solidFill>
-                  <a:srgbClr val="22282E"/>
-                </a:solidFill>
-              </a:rPr>
-              <a:t>•  Configura FakeNet-NG y compara su salida con INetSim.</a:t>
-            </a:r>
-          </a:p>
-          <a:p>
-            <a:pPr>
-              <a:spcAft>
-                <a:spcPts val="600"/>
-              </a:spcAft>
-            </a:pPr>
-            <a:r>
-              <a:rPr sz="1500">
-                <a:solidFill>
-                  <a:srgbClr val="22282E"/>
-                </a:solidFill>
-              </a:rPr>
-              <a:t>•  Enumera 5 artefactos que un malware puede usar para detectar VirtualBox.</a:t>
-            </a:r>
-          </a:p>
-          <a:p>
-            <a:pPr>
-              <a:spcAft>
-                <a:spcPts val="600"/>
-              </a:spcAft>
-            </a:pPr>
-            <a:r>
-              <a:rPr sz="1500">
-                <a:solidFill>
-                  <a:srgbClr val="22282E"/>
-                </a:solidFill>
-              </a:rPr>
-              <a:t>•  Documenta un runbook de "restauración a limpio" en menos de 6 pasos.</a:t>
-            </a:r>
-          </a:p>
-          <a:p>
-            <a:pPr>
-              <a:spcAft>
-                <a:spcPts val="600"/>
-              </a:spcAft>
-            </a:pPr>
-            <a:r>
-              <a:rPr sz="1500">
-                <a:solidFill>
-                  <a:srgbClr val="22282E"/>
-                </a:solidFill>
-              </a:rPr>
-              <a:t>•  Crea un snapshot antes y después de una ejecución simulada (usa un binario inocuo).</a:t>
-            </a:r>
-          </a:p>
-          <a:p>
-            <a:pPr>
-              <a:spcAft>
-                <a:spcPts val="600"/>
-              </a:spcAft>
-            </a:pPr>
-            <a:r>
-              <a:rPr sz="1500">
-                <a:solidFill>
-                  <a:srgbClr val="22282E"/>
-                </a:solidFill>
-              </a:rPr>
-              <a:t>•  Diseña una regla de firewall del hypervisor que garantice el aislamiento.</a:t>
+              <a:t>•  Hypervisor: VirtualBox o VMware Workstation.</a:t>
+            </a:r>
+          </a:p>
+          <a:p>
+            <a:pPr>
+              <a:spcAft>
+                <a:spcPts val="600"/>
+              </a:spcAft>
+            </a:pPr>
+            <a:r>
+              <a:rPr sz="1500">
+                <a:solidFill>
+                  <a:srgbClr val="22282E"/>
+                </a:solidFill>
+              </a:rPr>
+              <a:t>•  VM de análisis: Windows 10 + FLARE VM (https://github.com/mandiant/flare-vm).</a:t>
+            </a:r>
+          </a:p>
+          <a:p>
+            <a:pPr>
+              <a:spcAft>
+                <a:spcPts val="600"/>
+              </a:spcAft>
+            </a:pPr>
+            <a:r>
+              <a:rPr sz="1500">
+                <a:solidFill>
+                  <a:srgbClr val="22282E"/>
+                </a:solidFill>
+              </a:rPr>
+              <a:t>•  VM de servicios: REMnux (https://remnux.org) con INetSim o FakeNet-NG.</a:t>
+            </a:r>
+          </a:p>
+          <a:p>
+            <a:pPr>
+              <a:spcAft>
+                <a:spcPts val="600"/>
+              </a:spcAft>
+            </a:pPr>
+            <a:r>
+              <a:rPr sz="1500">
+                <a:solidFill>
+                  <a:srgbClr val="22282E"/>
+                </a:solidFill>
+              </a:rPr>
+              <a:t>•  Herramientas de captura: Wireshark, Process Monitor, Process Hacker.</a:t>
+            </a:r>
+          </a:p>
+          <a:p>
+            <a:pPr>
+              <a:spcAft>
+                <a:spcPts val="600"/>
+              </a:spcAft>
+            </a:pPr>
+            <a:r>
+              <a:rPr sz="1500">
+                <a:solidFill>
+                  <a:srgbClr val="22282E"/>
+                </a:solidFill>
+              </a:rPr>
+              <a:t>•  Descompresor con soporte de contraseña (7-Zip) para muestras cifradas.</a:t>
             </a:r>
           </a:p>
         </p:txBody>
@@ -4703,7 +5064,7 @@
                   <a:srgbClr val="0B3D2E"/>
                 </a:solidFill>
               </a:rPr>
-              <a:t>📝 Reto verificable</a:t>
+              <a:t>🧪 Laboratorio guiado</a:t>
             </a:r>
           </a:p>
         </p:txBody>
@@ -4741,22 +5102,97 @@
                   <a:srgbClr val="22282E"/>
                 </a:solidFill>
               </a:rPr>
-              <a:t>•  Entrega un laboratorio funcional donde una petición HTTP desde la VM de análisis sea respondida por tu VM de servicios y ninguna petición llegue a Internet.</a:t>
-            </a:r>
-          </a:p>
-          <a:p>
-            <a:pPr>
-              <a:spcAft>
-                <a:spcPts val="600"/>
-              </a:spcAft>
-            </a:pPr>
-            <a:r>
-              <a:rPr sz="1500">
-                <a:solidFill>
-                  <a:srgbClr val="22282E"/>
-                </a:solidFill>
-              </a:rPr>
-              <a:t>•  Criterio de aceptación: una captura de Wireshark muestra la resolución DNS y la respuesta HTTP servidas por 10.0.0.1, y ping a una IP pública falla por timeout.</a:t>
+              <a:t>•  Crea dos VMs: WIN-ANALYSIS (Windows) y LINUX-SERVICES (REMnux). Asígnalas a una red interna llamada labnet; ninguna tiene adaptador NAT/bridge.</a:t>
+            </a:r>
+          </a:p>
+          <a:p>
+            <a:pPr>
+              <a:spcAft>
+                <a:spcPts val="600"/>
+              </a:spcAft>
+            </a:pPr>
+            <a:r>
+              <a:rPr sz="1500">
+                <a:solidFill>
+                  <a:srgbClr val="22282E"/>
+                </a:solidFill>
+              </a:rPr>
+              <a:t>•  En LINUX-SERVICES fija IP estática (p. ej. 10.0.0.1) y en WIN-ANALYSIS pon gateway y DNS apuntando a 10.0.0.1.</a:t>
+            </a:r>
+          </a:p>
+          <a:p>
+            <a:pPr>
+              <a:spcAft>
+                <a:spcPts val="600"/>
+              </a:spcAft>
+            </a:pPr>
+            <a:r>
+              <a:rPr sz="1500">
+                <a:solidFill>
+                  <a:srgbClr val="22282E"/>
+                </a:solidFill>
+              </a:rPr>
+              <a:t>•  Instala FLARE VM en Windows siguiendo su script de instalación. Reinicia y verifica que aparecen las herramientas.</a:t>
+            </a:r>
+          </a:p>
+          <a:p>
+            <a:pPr>
+              <a:spcAft>
+                <a:spcPts val="600"/>
+              </a:spcAft>
+            </a:pPr>
+            <a:r>
+              <a:rPr sz="1500">
+                <a:solidFill>
+                  <a:srgbClr val="22282E"/>
+                </a:solidFill>
+              </a:rPr>
+              <a:t>•  En REMnux arranca INetSim: sudo inetsim y confirma que responde HTTP/DNS. Alternativa en Windows: fakenet dentro de la propia VM de análisis.</a:t>
+            </a:r>
+          </a:p>
+          <a:p>
+            <a:pPr>
+              <a:spcAft>
+                <a:spcPts val="600"/>
+              </a:spcAft>
+            </a:pPr>
+            <a:r>
+              <a:rPr sz="1500">
+                <a:solidFill>
+                  <a:srgbClr val="22282E"/>
+                </a:solidFill>
+              </a:rPr>
+              <a:t>•  Desde WIN-ANALYSIS, prueba nslookup ejemplo.com y curl http://ejemplo.com; deben resolver y responder gracias a INetSim, sin Internet real.</a:t>
+            </a:r>
+          </a:p>
+          <a:p>
+            <a:pPr>
+              <a:spcAft>
+                <a:spcPts val="600"/>
+              </a:spcAft>
+            </a:pPr>
+            <a:r>
+              <a:rPr sz="1500">
+                <a:solidFill>
+                  <a:srgbClr val="22282E"/>
+                </a:solidFill>
+              </a:rPr>
+              <a:t>•  Toma un snapshot limpio de cada VM llamado base-clean.</a:t>
+            </a:r>
+          </a:p>
+          <a:p>
+            <a:pPr>
+              <a:spcAft>
+                <a:spcPts val="600"/>
+              </a:spcAft>
+            </a:pPr>
+            <a:r>
+              <a:rPr sz="1500">
+                <a:solidFill>
+                  <a:srgbClr val="22282E"/>
+                </a:solidFill>
+              </a:rPr>
+              <a:t>•  Verifica el aislamiento: intenta ping 8.8.8.8 desde Windows; debe fallar. Si responde, corrige la red antes de continuar.</a:t>
             </a:r>
           </a:p>
         </p:txBody>
